--- a/docs/pptx/carbo/ritu-carbo-linsubhr-egfrdisc-death.pptx
+++ b/docs/pptx/carbo/ritu-carbo-linsubhr-egfrdisc-death.pptx
@@ -2443,7 +2443,7 @@
           </p:nvSpPr>
           <p:spPr>
             <a:xfrm>
-              <a:off x="1810493" y="2073503"/>
+              <a:off x="1813815" y="2073503"/>
               <a:ext cx="0" cy="3649639"/>
             </a:xfrm>
             <a:custGeom>
@@ -2486,7 +2486,7 @@
           </p:nvSpPr>
           <p:spPr>
             <a:xfrm>
-              <a:off x="4291851" y="2073503"/>
+              <a:off x="4291714" y="2073503"/>
               <a:ext cx="0" cy="3649639"/>
             </a:xfrm>
             <a:custGeom>
@@ -2529,7 +2529,7 @@
           </p:nvSpPr>
           <p:spPr>
             <a:xfrm>
-              <a:off x="6773208" y="2073503"/>
+              <a:off x="6769614" y="2073503"/>
               <a:ext cx="0" cy="3649639"/>
             </a:xfrm>
             <a:custGeom>
@@ -2787,7 +2787,7 @@
           </p:nvSpPr>
           <p:spPr>
             <a:xfrm>
-              <a:off x="3051172" y="2073503"/>
+              <a:off x="3052764" y="2073503"/>
               <a:ext cx="0" cy="3649639"/>
             </a:xfrm>
             <a:custGeom>
@@ -2830,7 +2830,7 @@
           </p:nvSpPr>
           <p:spPr>
             <a:xfrm>
-              <a:off x="5532530" y="2073503"/>
+              <a:off x="5530664" y="2073503"/>
               <a:ext cx="0" cy="3649639"/>
             </a:xfrm>
             <a:custGeom>
@@ -2873,7 +2873,7 @@
           </p:nvSpPr>
           <p:spPr>
             <a:xfrm>
-              <a:off x="8013887" y="2073503"/>
+              <a:off x="8008563" y="2073503"/>
               <a:ext cx="0" cy="3649639"/>
             </a:xfrm>
             <a:custGeom>
@@ -4197,150 +4197,147 @@
           </p:nvSpPr>
           <p:spPr>
             <a:xfrm>
-              <a:off x="5071411" y="2073503"/>
-              <a:ext cx="3191268" cy="3482669"/>
+              <a:off x="5164681" y="2073503"/>
+              <a:ext cx="3097998" cy="3483324"/>
             </a:xfrm>
             <a:custGeom>
               <a:avLst/>
               <a:pathLst>
-                <a:path w="3191268" h="3482669">
+                <a:path w="3097998" h="3483324">
                   <a:moveTo>
                     <a:pt x="0" y="0"/>
                   </a:moveTo>
                   <a:lnTo>
-                    <a:pt x="39876" y="347083"/>
-                  </a:lnTo>
-                  <a:lnTo>
-                    <a:pt x="111499" y="867122"/>
-                  </a:lnTo>
-                  <a:lnTo>
-                    <a:pt x="183121" y="1300942"/>
-                  </a:lnTo>
-                  <a:lnTo>
-                    <a:pt x="254744" y="1662838"/>
-                  </a:lnTo>
-                  <a:lnTo>
-                    <a:pt x="326366" y="1964733"/>
-                  </a:lnTo>
-                  <a:lnTo>
-                    <a:pt x="397989" y="2216576"/>
-                  </a:lnTo>
-                  <a:lnTo>
-                    <a:pt x="469612" y="2426665"/>
-                  </a:lnTo>
-                  <a:lnTo>
-                    <a:pt x="541234" y="2601923"/>
-                  </a:lnTo>
-                  <a:lnTo>
-                    <a:pt x="612857" y="2748124"/>
-                  </a:lnTo>
-                  <a:lnTo>
-                    <a:pt x="684479" y="2870085"/>
-                  </a:lnTo>
-                  <a:lnTo>
-                    <a:pt x="756102" y="2971826"/>
-                  </a:lnTo>
-                  <a:lnTo>
-                    <a:pt x="827724" y="3056700"/>
-                  </a:lnTo>
-                  <a:lnTo>
-                    <a:pt x="899347" y="3127501"/>
-                  </a:lnTo>
-                  <a:lnTo>
-                    <a:pt x="970969" y="3186565"/>
-                  </a:lnTo>
-                  <a:lnTo>
-                    <a:pt x="1042592" y="3235835"/>
-                  </a:lnTo>
-                  <a:lnTo>
-                    <a:pt x="1114214" y="3276938"/>
-                  </a:lnTo>
-                  <a:lnTo>
-                    <a:pt x="1185837" y="3311225"/>
-                  </a:lnTo>
-                  <a:lnTo>
-                    <a:pt x="1257459" y="3339828"/>
-                  </a:lnTo>
-                  <a:lnTo>
-                    <a:pt x="1329082" y="3363689"/>
-                  </a:lnTo>
-                  <a:lnTo>
-                    <a:pt x="1400704" y="3383594"/>
-                  </a:lnTo>
-                  <a:lnTo>
-                    <a:pt x="1472327" y="3400198"/>
-                  </a:lnTo>
-                  <a:lnTo>
-                    <a:pt x="1543949" y="3414050"/>
-                  </a:lnTo>
-                  <a:lnTo>
-                    <a:pt x="1615572" y="3425605"/>
-                  </a:lnTo>
-                  <a:lnTo>
-                    <a:pt x="1687194" y="3435245"/>
-                  </a:lnTo>
-                  <a:lnTo>
-                    <a:pt x="1758817" y="3443286"/>
-                  </a:lnTo>
-                  <a:lnTo>
-                    <a:pt x="1830440" y="3449994"/>
-                  </a:lnTo>
-                  <a:lnTo>
-                    <a:pt x="1902062" y="3455590"/>
-                  </a:lnTo>
-                  <a:lnTo>
-                    <a:pt x="1973685" y="3460258"/>
-                  </a:lnTo>
-                  <a:lnTo>
-                    <a:pt x="2045307" y="3464152"/>
-                  </a:lnTo>
-                  <a:lnTo>
-                    <a:pt x="2116930" y="3467401"/>
-                  </a:lnTo>
-                  <a:lnTo>
-                    <a:pt x="2188552" y="3470111"/>
-                  </a:lnTo>
-                  <a:lnTo>
-                    <a:pt x="2260175" y="3472372"/>
-                  </a:lnTo>
-                  <a:lnTo>
-                    <a:pt x="2331797" y="3474257"/>
-                  </a:lnTo>
-                  <a:lnTo>
-                    <a:pt x="2403420" y="3475831"/>
-                  </a:lnTo>
-                  <a:lnTo>
-                    <a:pt x="2475042" y="3477143"/>
-                  </a:lnTo>
-                  <a:lnTo>
-                    <a:pt x="2546665" y="3478238"/>
-                  </a:lnTo>
-                  <a:lnTo>
-                    <a:pt x="2618287" y="3479151"/>
-                  </a:lnTo>
-                  <a:lnTo>
-                    <a:pt x="2689910" y="3479913"/>
-                  </a:lnTo>
-                  <a:lnTo>
-                    <a:pt x="2761532" y="3480549"/>
-                  </a:lnTo>
-                  <a:lnTo>
-                    <a:pt x="2833155" y="3481079"/>
-                  </a:lnTo>
-                  <a:lnTo>
-                    <a:pt x="2904777" y="3481521"/>
-                  </a:lnTo>
-                  <a:lnTo>
-                    <a:pt x="2976400" y="3481890"/>
-                  </a:lnTo>
-                  <a:lnTo>
-                    <a:pt x="3048022" y="3482198"/>
-                  </a:lnTo>
-                  <a:lnTo>
-                    <a:pt x="3119645" y="3482455"/>
-                  </a:lnTo>
-                  <a:lnTo>
-                    <a:pt x="3191268" y="3482669"/>
+                    <a:pt x="18229" y="194014"/>
+                  </a:lnTo>
+                  <a:lnTo>
+                    <a:pt x="89851" y="812888"/>
+                  </a:lnTo>
+                  <a:lnTo>
+                    <a:pt x="161474" y="1315337"/>
+                  </a:lnTo>
+                  <a:lnTo>
+                    <a:pt x="233096" y="1723265"/>
+                  </a:lnTo>
+                  <a:lnTo>
+                    <a:pt x="304719" y="2054451"/>
+                  </a:lnTo>
+                  <a:lnTo>
+                    <a:pt x="376342" y="2323334"/>
+                  </a:lnTo>
+                  <a:lnTo>
+                    <a:pt x="447964" y="2541634"/>
+                  </a:lnTo>
+                  <a:lnTo>
+                    <a:pt x="519587" y="2718867"/>
+                  </a:lnTo>
+                  <a:lnTo>
+                    <a:pt x="591209" y="2862758"/>
+                  </a:lnTo>
+                  <a:lnTo>
+                    <a:pt x="662832" y="2979580"/>
+                  </a:lnTo>
+                  <a:lnTo>
+                    <a:pt x="734454" y="3074426"/>
+                  </a:lnTo>
+                  <a:lnTo>
+                    <a:pt x="806077" y="3151428"/>
+                  </a:lnTo>
+                  <a:lnTo>
+                    <a:pt x="877699" y="3213945"/>
+                  </a:lnTo>
+                  <a:lnTo>
+                    <a:pt x="949322" y="3264701"/>
+                  </a:lnTo>
+                  <a:lnTo>
+                    <a:pt x="1020944" y="3305908"/>
+                  </a:lnTo>
+                  <a:lnTo>
+                    <a:pt x="1092567" y="3339364"/>
+                  </a:lnTo>
+                  <a:lnTo>
+                    <a:pt x="1164189" y="3366525"/>
+                  </a:lnTo>
+                  <a:lnTo>
+                    <a:pt x="1235812" y="3388577"/>
+                  </a:lnTo>
+                  <a:lnTo>
+                    <a:pt x="1307434" y="3406481"/>
+                  </a:lnTo>
+                  <a:lnTo>
+                    <a:pt x="1379057" y="3421016"/>
+                  </a:lnTo>
+                  <a:lnTo>
+                    <a:pt x="1450679" y="3432817"/>
+                  </a:lnTo>
+                  <a:lnTo>
+                    <a:pt x="1522302" y="3442398"/>
+                  </a:lnTo>
+                  <a:lnTo>
+                    <a:pt x="1593924" y="3450177"/>
+                  </a:lnTo>
+                  <a:lnTo>
+                    <a:pt x="1665547" y="3456492"/>
+                  </a:lnTo>
+                  <a:lnTo>
+                    <a:pt x="1737170" y="3461619"/>
+                  </a:lnTo>
+                  <a:lnTo>
+                    <a:pt x="1808792" y="3465782"/>
+                  </a:lnTo>
+                  <a:lnTo>
+                    <a:pt x="1880415" y="3469161"/>
+                  </a:lnTo>
+                  <a:lnTo>
+                    <a:pt x="1952037" y="3471905"/>
+                  </a:lnTo>
+                  <a:lnTo>
+                    <a:pt x="2023660" y="3474133"/>
+                  </a:lnTo>
+                  <a:lnTo>
+                    <a:pt x="2095282" y="3475941"/>
+                  </a:lnTo>
+                  <a:lnTo>
+                    <a:pt x="2166905" y="3477410"/>
+                  </a:lnTo>
+                  <a:lnTo>
+                    <a:pt x="2238527" y="3478602"/>
+                  </a:lnTo>
+                  <a:lnTo>
+                    <a:pt x="2310150" y="3479570"/>
+                  </a:lnTo>
+                  <a:lnTo>
+                    <a:pt x="2381772" y="3480355"/>
+                  </a:lnTo>
+                  <a:lnTo>
+                    <a:pt x="2453395" y="3480993"/>
+                  </a:lnTo>
+                  <a:lnTo>
+                    <a:pt x="2525017" y="3481511"/>
+                  </a:lnTo>
+                  <a:lnTo>
+                    <a:pt x="2596640" y="3481932"/>
+                  </a:lnTo>
+                  <a:lnTo>
+                    <a:pt x="2668262" y="3482273"/>
+                  </a:lnTo>
+                  <a:lnTo>
+                    <a:pt x="2739885" y="3482550"/>
+                  </a:lnTo>
+                  <a:lnTo>
+                    <a:pt x="2811507" y="3482775"/>
+                  </a:lnTo>
+                  <a:lnTo>
+                    <a:pt x="2883130" y="3482958"/>
+                  </a:lnTo>
+                  <a:lnTo>
+                    <a:pt x="2954752" y="3483106"/>
+                  </a:lnTo>
+                  <a:lnTo>
+                    <a:pt x="3026375" y="3483227"/>
+                  </a:lnTo>
+                  <a:lnTo>
+                    <a:pt x="3097998" y="3483324"/>
                   </a:lnTo>
                 </a:path>
               </a:pathLst>
@@ -4412,7 +4409,7 @@
           </p:nvSpPr>
           <p:spPr>
             <a:xfrm>
-              <a:off x="5636831" y="2073503"/>
+              <a:off x="5656410" y="2073503"/>
               <a:ext cx="0" cy="3649639"/>
             </a:xfrm>
             <a:custGeom>
@@ -4455,7 +4452,7 @@
           </p:nvSpPr>
           <p:spPr>
             <a:xfrm>
-              <a:off x="4328179" y="2073503"/>
+              <a:off x="4335733" y="2073503"/>
               <a:ext cx="0" cy="3649639"/>
             </a:xfrm>
             <a:custGeom>
@@ -4498,7 +4495,7 @@
           </p:nvSpPr>
           <p:spPr>
             <a:xfrm>
-              <a:off x="6683624" y="2073503"/>
+              <a:off x="6684598" y="2073503"/>
               <a:ext cx="0" cy="3649639"/>
             </a:xfrm>
             <a:custGeom>
@@ -4771,7 +4768,7 @@
           </p:nvSpPr>
           <p:spPr>
             <a:xfrm>
-              <a:off x="2970385" y="5785772"/>
+              <a:off x="2971977" y="5785772"/>
               <a:ext cx="161574" cy="80101"/>
             </a:xfrm>
             <a:prstGeom prst="rect">
@@ -4817,7 +4814,7 @@
           </p:nvSpPr>
           <p:spPr>
             <a:xfrm>
-              <a:off x="5501440" y="5785772"/>
+              <a:off x="5499574" y="5785772"/>
               <a:ext cx="62179" cy="80101"/>
             </a:xfrm>
             <a:prstGeom prst="rect">
@@ -4863,7 +4860,7 @@
           </p:nvSpPr>
           <p:spPr>
             <a:xfrm>
-              <a:off x="7951708" y="5785772"/>
+              <a:off x="7946384" y="5785772"/>
               <a:ext cx="124358" cy="80101"/>
             </a:xfrm>
             <a:prstGeom prst="rect">
@@ -5034,7 +5031,7 @@
                   <a:latin typeface="Helvetica"/>
                   <a:cs typeface="Helvetica"/>
                 </a:rPr>
-                <a:t>HR per 10 mL/min decline: 12.33 (0.00-Inf), p_Bonf = 1.000 (n = 6)  |  per IQR decline (Δ = 23.7): 388.22 (0.00-Inf)  |  IQR: [-12.1, 11.6]</a:t>
+                <a:t>HR per 10 mL/min decline: 17.89 (0.00-Inf), p_Bonf = 1.000 (n = 6)  |  per IQR decline (Δ = 23.7): 929.54 (0.00-Inf)  |  IQR: [-12.1, 11.6]</a:t>
               </a:r>
             </a:p>
           </p:txBody>
